--- a/docs/HackCult26-Smart-Bijuka-Pitch-Deck.pptx
+++ b/docs/HackCult26-Smart-Bijuka-Pitch-Deck.pptx
@@ -2134,7 +2134,7 @@
                 <a:ea typeface="Calibri" pitchFamily="34" charset="-122"/>
                 <a:cs typeface="Calibri" pitchFamily="34" charset="-120"/>
               </a:rPr>
-              <a:t>GitHub: []</a:t>
+              <a:t>GitHub: github.com/pravashsingh775/Hackcult_Hackathon_IIT_Gandhinagar</a:t>
             </a:r>
             <a:endParaRPr lang="en-US" sz="1300" dirty="0"/>
           </a:p>
